--- a/slides/00_course_intro.pptx
+++ b/slides/00_course_intro.pptx
@@ -10,7 +10,9 @@
     <p:sldId id="394" r:id="rId4"/>
     <p:sldId id="391" r:id="rId5"/>
     <p:sldId id="392" r:id="rId6"/>
-    <p:sldId id="393" r:id="rId7"/>
+    <p:sldId id="395" r:id="rId7"/>
+    <p:sldId id="263" r:id="rId8"/>
+    <p:sldId id="393" r:id="rId9"/>
   </p:sldIdLst>
   <p:sldSz cx="12192000" cy="6858000"/>
   <p:notesSz cx="6858000" cy="9144000"/>
@@ -1230,13 +1232,13 @@
       <dgm:prSet presAssocID="{85556EB6-77CF-499D-BB6E-2C5024EC1F11}" presName="iconRect" presStyleLbl="node1" presStyleIdx="0" presStyleCnt="3"/>
       <dgm:spPr>
         <a:blipFill>
-          <a:blip xmlns:r="http://schemas.openxmlformats.org/officeDocument/2006/relationships" r:embed="rId1">
+          <a:blip xmlns:r="http://schemas.openxmlformats.org/officeDocument/2006/relationships">
             <a:extLst>
               <a:ext uri="{28A0092B-C50C-407E-A947-70E740481C1C}">
                 <a14:useLocalDpi xmlns:a14="http://schemas.microsoft.com/office/drawing/2010/main" val="0"/>
               </a:ext>
               <a:ext uri="{96DAC541-7B7A-43D3-8B79-37D633B846F1}">
-                <asvg:svgBlip xmlns:asvg="http://schemas.microsoft.com/office/drawing/2016/SVG/main" r:embed="rId2"/>
+                <asvg:svgBlip xmlns:asvg="http://schemas.microsoft.com/office/drawing/2016/SVG/main" r:embed="rId1"/>
               </a:ext>
             </a:extLst>
           </a:blip>
@@ -1283,13 +1285,13 @@
       <dgm:prSet presAssocID="{FD37932E-AB41-4F9E-B178-8A6DF0D730CD}" presName="iconRect" presStyleLbl="node1" presStyleIdx="1" presStyleCnt="3"/>
       <dgm:spPr>
         <a:blipFill>
-          <a:blip xmlns:r="http://schemas.openxmlformats.org/officeDocument/2006/relationships" r:embed="rId3">
+          <a:blip xmlns:r="http://schemas.openxmlformats.org/officeDocument/2006/relationships">
             <a:extLst>
               <a:ext uri="{28A0092B-C50C-407E-A947-70E740481C1C}">
                 <a14:useLocalDpi xmlns:a14="http://schemas.microsoft.com/office/drawing/2010/main" val="0"/>
               </a:ext>
               <a:ext uri="{96DAC541-7B7A-43D3-8B79-37D633B846F1}">
-                <asvg:svgBlip xmlns:asvg="http://schemas.microsoft.com/office/drawing/2016/SVG/main" r:embed="rId4"/>
+                <asvg:svgBlip xmlns:asvg="http://schemas.microsoft.com/office/drawing/2016/SVG/main" r:embed="rId2"/>
               </a:ext>
             </a:extLst>
           </a:blip>
@@ -1336,10 +1338,10 @@
       <dgm:prSet presAssocID="{343D494A-2D2E-4876-BC06-03FE2CAE800A}" presName="iconRect" presStyleLbl="node1" presStyleIdx="2" presStyleCnt="3"/>
       <dgm:spPr>
         <a:blipFill>
-          <a:blip xmlns:r="http://schemas.openxmlformats.org/officeDocument/2006/relationships" r:embed="rId5">
+          <a:blip xmlns:r="http://schemas.openxmlformats.org/officeDocument/2006/relationships">
             <a:extLst>
               <a:ext uri="{96DAC541-7B7A-43D3-8B79-37D633B846F1}">
-                <asvg:svgBlip xmlns:asvg="http://schemas.microsoft.com/office/drawing/2016/SVG/main" r:embed="rId6"/>
+                <asvg:svgBlip xmlns:asvg="http://schemas.microsoft.com/office/drawing/2016/SVG/main" r:embed="rId3"/>
               </a:ext>
             </a:extLst>
           </a:blip>
@@ -1466,13 +1468,13 @@
           <a:avLst/>
         </a:prstGeom>
         <a:blipFill>
-          <a:blip xmlns:r="http://schemas.openxmlformats.org/officeDocument/2006/relationships" r:embed="rId1">
+          <a:blip xmlns:r="http://schemas.openxmlformats.org/officeDocument/2006/relationships">
             <a:extLst>
               <a:ext uri="{28A0092B-C50C-407E-A947-70E740481C1C}">
                 <a14:useLocalDpi xmlns:a14="http://schemas.microsoft.com/office/drawing/2010/main" val="0"/>
               </a:ext>
               <a:ext uri="{96DAC541-7B7A-43D3-8B79-37D633B846F1}">
-                <asvg:svgBlip xmlns:asvg="http://schemas.microsoft.com/office/drawing/2016/SVG/main" r:embed="rId2"/>
+                <asvg:svgBlip xmlns:asvg="http://schemas.microsoft.com/office/drawing/2016/SVG/main" r:embed="rId1"/>
               </a:ext>
             </a:extLst>
           </a:blip>
@@ -1620,13 +1622,13 @@
           <a:avLst/>
         </a:prstGeom>
         <a:blipFill>
-          <a:blip xmlns:r="http://schemas.openxmlformats.org/officeDocument/2006/relationships" r:embed="rId3">
+          <a:blip xmlns:r="http://schemas.openxmlformats.org/officeDocument/2006/relationships">
             <a:extLst>
               <a:ext uri="{28A0092B-C50C-407E-A947-70E740481C1C}">
                 <a14:useLocalDpi xmlns:a14="http://schemas.microsoft.com/office/drawing/2010/main" val="0"/>
               </a:ext>
               <a:ext uri="{96DAC541-7B7A-43D3-8B79-37D633B846F1}">
-                <asvg:svgBlip xmlns:asvg="http://schemas.microsoft.com/office/drawing/2016/SVG/main" r:embed="rId4"/>
+                <asvg:svgBlip xmlns:asvg="http://schemas.microsoft.com/office/drawing/2016/SVG/main" r:embed="rId2"/>
               </a:ext>
             </a:extLst>
           </a:blip>
@@ -1774,10 +1776,10 @@
           <a:avLst/>
         </a:prstGeom>
         <a:blipFill>
-          <a:blip xmlns:r="http://schemas.openxmlformats.org/officeDocument/2006/relationships" r:embed="rId5">
+          <a:blip xmlns:r="http://schemas.openxmlformats.org/officeDocument/2006/relationships">
             <a:extLst>
               <a:ext uri="{96DAC541-7B7A-43D3-8B79-37D633B846F1}">
-                <asvg:svgBlip xmlns:asvg="http://schemas.microsoft.com/office/drawing/2016/SVG/main" r:embed="rId6"/>
+                <asvg:svgBlip xmlns:asvg="http://schemas.microsoft.com/office/drawing/2016/SVG/main" r:embed="rId3"/>
               </a:ext>
             </a:extLst>
           </a:blip>
@@ -3282,7 +3284,7 @@
           <a:p>
             <a:fld id="{3E22BF2E-04DA-469E-97C5-BB68A0368813}" type="datetimeFigureOut">
               <a:rPr lang="en-US" smtClean="0"/>
-              <a:t>1/21/2026</a:t>
+              <a:t>3/30/2026</a:t>
             </a:fld>
             <a:endParaRPr lang="en-US"/>
           </a:p>
@@ -3480,7 +3482,7 @@
           <a:p>
             <a:fld id="{3E22BF2E-04DA-469E-97C5-BB68A0368813}" type="datetimeFigureOut">
               <a:rPr lang="en-US" smtClean="0"/>
-              <a:t>1/21/2026</a:t>
+              <a:t>3/30/2026</a:t>
             </a:fld>
             <a:endParaRPr lang="en-US"/>
           </a:p>
@@ -3688,7 +3690,7 @@
           <a:p>
             <a:fld id="{3E22BF2E-04DA-469E-97C5-BB68A0368813}" type="datetimeFigureOut">
               <a:rPr lang="en-US" smtClean="0"/>
-              <a:t>1/21/2026</a:t>
+              <a:t>3/30/2026</a:t>
             </a:fld>
             <a:endParaRPr lang="en-US"/>
           </a:p>
@@ -3896,7 +3898,7 @@
           <a:p>
             <a:fld id="{3E22BF2E-04DA-469E-97C5-BB68A0368813}" type="datetimeFigureOut">
               <a:rPr lang="en-US" smtClean="0"/>
-              <a:t>1/21/2026</a:t>
+              <a:t>3/30/2026</a:t>
             </a:fld>
             <a:endParaRPr lang="en-US"/>
           </a:p>
@@ -4171,7 +4173,7 @@
           <a:p>
             <a:fld id="{3E22BF2E-04DA-469E-97C5-BB68A0368813}" type="datetimeFigureOut">
               <a:rPr lang="en-US" smtClean="0"/>
-              <a:t>1/21/2026</a:t>
+              <a:t>3/30/2026</a:t>
             </a:fld>
             <a:endParaRPr lang="en-US"/>
           </a:p>
@@ -4436,7 +4438,7 @@
           <a:p>
             <a:fld id="{3E22BF2E-04DA-469E-97C5-BB68A0368813}" type="datetimeFigureOut">
               <a:rPr lang="en-US" smtClean="0"/>
-              <a:t>1/21/2026</a:t>
+              <a:t>3/30/2026</a:t>
             </a:fld>
             <a:endParaRPr lang="en-US"/>
           </a:p>
@@ -4848,7 +4850,7 @@
           <a:p>
             <a:fld id="{3E22BF2E-04DA-469E-97C5-BB68A0368813}" type="datetimeFigureOut">
               <a:rPr lang="en-US" smtClean="0"/>
-              <a:t>1/21/2026</a:t>
+              <a:t>3/30/2026</a:t>
             </a:fld>
             <a:endParaRPr lang="en-US"/>
           </a:p>
@@ -4989,7 +4991,7 @@
           <a:p>
             <a:fld id="{3E22BF2E-04DA-469E-97C5-BB68A0368813}" type="datetimeFigureOut">
               <a:rPr lang="en-US" smtClean="0"/>
-              <a:t>1/21/2026</a:t>
+              <a:t>3/30/2026</a:t>
             </a:fld>
             <a:endParaRPr lang="en-US"/>
           </a:p>
@@ -5102,7 +5104,7 @@
           <a:p>
             <a:fld id="{3E22BF2E-04DA-469E-97C5-BB68A0368813}" type="datetimeFigureOut">
               <a:rPr lang="en-US" smtClean="0"/>
-              <a:t>1/21/2026</a:t>
+              <a:t>3/30/2026</a:t>
             </a:fld>
             <a:endParaRPr lang="en-US"/>
           </a:p>
@@ -5413,7 +5415,7 @@
           <a:p>
             <a:fld id="{3E22BF2E-04DA-469E-97C5-BB68A0368813}" type="datetimeFigureOut">
               <a:rPr lang="en-US" smtClean="0"/>
-              <a:t>1/21/2026</a:t>
+              <a:t>3/30/2026</a:t>
             </a:fld>
             <a:endParaRPr lang="en-US"/>
           </a:p>
@@ -5701,7 +5703,7 @@
           <a:p>
             <a:fld id="{3E22BF2E-04DA-469E-97C5-BB68A0368813}" type="datetimeFigureOut">
               <a:rPr lang="en-US" smtClean="0"/>
-              <a:t>1/21/2026</a:t>
+              <a:t>3/30/2026</a:t>
             </a:fld>
             <a:endParaRPr lang="en-US"/>
           </a:p>
@@ -5942,7 +5944,7 @@
           <a:p>
             <a:fld id="{3E22BF2E-04DA-469E-97C5-BB68A0368813}" type="datetimeFigureOut">
               <a:rPr lang="en-US" smtClean="0"/>
-              <a:t>1/21/2026</a:t>
+              <a:t>3/30/2026</a:t>
             </a:fld>
             <a:endParaRPr lang="en-US"/>
           </a:p>
@@ -6897,6 +6899,87 @@
           </a:extLst>
         </p:spPr>
       </p:pic>
+      <p:grpSp>
+        <p:nvGrpSpPr>
+          <p:cNvPr id="7" name="Group 6">
+            <a:extLst>
+              <a:ext uri="{FF2B5EF4-FFF2-40B4-BE49-F238E27FC236}">
+                <a16:creationId xmlns:a16="http://schemas.microsoft.com/office/drawing/2014/main" id="{DA1C6744-BD97-2C10-F393-A0B726F71E7A}"/>
+              </a:ext>
+            </a:extLst>
+          </p:cNvPr>
+          <p:cNvGrpSpPr/>
+          <p:nvPr/>
+        </p:nvGrpSpPr>
+        <p:grpSpPr>
+          <a:xfrm>
+            <a:off x="10961016" y="4868822"/>
+            <a:ext cx="1037459" cy="1303078"/>
+            <a:chOff x="5248582" y="2401735"/>
+            <a:chExt cx="1694835" cy="2054530"/>
+          </a:xfrm>
+        </p:grpSpPr>
+        <p:pic>
+          <p:nvPicPr>
+            <p:cNvPr id="8" name="Picture 7">
+              <a:extLst>
+                <a:ext uri="{FF2B5EF4-FFF2-40B4-BE49-F238E27FC236}">
+                  <a16:creationId xmlns:a16="http://schemas.microsoft.com/office/drawing/2014/main" id="{2F5FC233-1ACF-0EE9-5B1F-F0A29270EECF}"/>
+                </a:ext>
+              </a:extLst>
+            </p:cNvPr>
+            <p:cNvPicPr>
+              <a:picLocks noChangeAspect="1"/>
+            </p:cNvPicPr>
+            <p:nvPr/>
+          </p:nvPicPr>
+          <p:blipFill>
+            <a:blip r:embed="rId6"/>
+            <a:stretch>
+              <a:fillRect/>
+            </a:stretch>
+          </p:blipFill>
+          <p:spPr>
+            <a:xfrm>
+              <a:off x="5248582" y="2401735"/>
+              <a:ext cx="1694835" cy="2054530"/>
+            </a:xfrm>
+            <a:prstGeom prst="rect">
+              <a:avLst/>
+            </a:prstGeom>
+          </p:spPr>
+        </p:pic>
+        <p:pic>
+          <p:nvPicPr>
+            <p:cNvPr id="9" name="Picture 8">
+              <a:extLst>
+                <a:ext uri="{FF2B5EF4-FFF2-40B4-BE49-F238E27FC236}">
+                  <a16:creationId xmlns:a16="http://schemas.microsoft.com/office/drawing/2014/main" id="{26CB3135-CE78-1137-FBA3-29AA8592D8FA}"/>
+                </a:ext>
+              </a:extLst>
+            </p:cNvPr>
+            <p:cNvPicPr>
+              <a:picLocks noChangeAspect="1"/>
+            </p:cNvPicPr>
+            <p:nvPr/>
+          </p:nvPicPr>
+          <p:blipFill>
+            <a:blip r:embed="rId7"/>
+            <a:stretch>
+              <a:fillRect/>
+            </a:stretch>
+          </p:blipFill>
+          <p:spPr>
+            <a:xfrm>
+              <a:off x="5315643" y="2435129"/>
+              <a:ext cx="1560711" cy="1560711"/>
+            </a:xfrm>
+            <a:prstGeom prst="rect">
+              <a:avLst/>
+            </a:prstGeom>
+          </p:spPr>
+        </p:pic>
+      </p:grpSp>
     </p:spTree>
     <p:extLst>
       <p:ext uri="{BB962C8B-B14F-4D97-AF65-F5344CB8AC3E}">
@@ -7772,7 +7855,7 @@
           <p:cNvPr id="2" name="Title 1">
             <a:extLst>
               <a:ext uri="{FF2B5EF4-FFF2-40B4-BE49-F238E27FC236}">
-                <a16:creationId xmlns:a16="http://schemas.microsoft.com/office/drawing/2014/main" id="{640B0874-44AF-8EFD-BCBB-851D6F009CA7}"/>
+                <a16:creationId xmlns:a16="http://schemas.microsoft.com/office/drawing/2014/main" id="{AEFBF597-7358-49C9-B29D-7FA85F42E21A}"/>
               </a:ext>
             </a:extLst>
           </p:cNvPr>
@@ -7790,7 +7873,7 @@
           <a:p>
             <a:r>
               <a:rPr lang="en-US" dirty="0"/>
-              <a:t>To Be Successful you need…</a:t>
+              <a:t>Tools and Support</a:t>
             </a:r>
           </a:p>
         </p:txBody>
@@ -7800,7 +7883,7 @@
           <p:cNvPr id="3" name="Content Placeholder 2">
             <a:extLst>
               <a:ext uri="{FF2B5EF4-FFF2-40B4-BE49-F238E27FC236}">
-                <a16:creationId xmlns:a16="http://schemas.microsoft.com/office/drawing/2014/main" id="{67A487AD-771D-8DAA-546E-E45BEF6D9AB6}"/>
+                <a16:creationId xmlns:a16="http://schemas.microsoft.com/office/drawing/2014/main" id="{DE8F9610-33EA-1E27-06F5-0CE9F526A15B}"/>
               </a:ext>
             </a:extLst>
           </p:cNvPr>
@@ -7813,74 +7896,825 @@
         </p:nvSpPr>
         <p:spPr/>
         <p:txBody>
-          <a:bodyPr/>
+          <a:bodyPr>
+            <a:normAutofit fontScale="77500" lnSpcReduction="20000"/>
+          </a:bodyPr>
           <a:lstStyle/>
           <a:p>
             <a:r>
+              <a:rPr lang="en-US" b="1" dirty="0"/>
+              <a:t>Canvas</a:t>
+            </a:r>
+            <a:r>
               <a:rPr lang="en-US" dirty="0"/>
+              <a:t>: For material, assignments, and communication.</a:t>
+            </a:r>
+          </a:p>
+          <a:p>
+            <a:endParaRPr lang="en-US" dirty="0"/>
+          </a:p>
+          <a:p>
+            <a:r>
+              <a:rPr lang="en-US" b="1" dirty="0"/>
+              <a:t>Course GitHub page</a:t>
+            </a:r>
+            <a:r>
+              <a:rPr lang="en-US" dirty="0"/>
+              <a:t>: </a:t>
+            </a:r>
+            <a:r>
+              <a:rPr lang="en-US" dirty="0">
+                <a:hlinkClick r:id="rId2"/>
+              </a:rPr>
+              <a:t>https://mhahsler.github.io/Introduction_to_Reinforcement_Learning/</a:t>
+            </a:r>
+            <a:r>
+              <a:rPr lang="en-US" dirty="0"/>
+              <a:t> </a:t>
+            </a:r>
+          </a:p>
+          <a:p>
+            <a:pPr lvl="1"/>
+            <a:r>
+              <a:rPr lang="en-US" dirty="0" err="1"/>
+              <a:t>Howtos</a:t>
+            </a:r>
+            <a:endParaRPr lang="en-US" dirty="0"/>
+          </a:p>
+          <a:p>
+            <a:pPr lvl="1"/>
+            <a:r>
+              <a:rPr lang="en-US" dirty="0"/>
+              <a:t>Slides</a:t>
+            </a:r>
+          </a:p>
+          <a:p>
+            <a:pPr lvl="1"/>
+            <a:r>
+              <a:rPr lang="en-US" dirty="0"/>
+              <a:t>Code Examples</a:t>
+            </a:r>
+          </a:p>
+          <a:p>
+            <a:endParaRPr lang="en-US" dirty="0"/>
+          </a:p>
+          <a:p>
+            <a:r>
+              <a:rPr lang="en-US" b="1" dirty="0"/>
+              <a:t>AI-Use Guideline: </a:t>
+            </a:r>
+          </a:p>
+          <a:p>
+            <a:pPr lvl="1"/>
+            <a:r>
+              <a:rPr lang="en-US" b="1" dirty="0"/>
+              <a:t>Self-study</a:t>
+            </a:r>
+            <a:r>
+              <a:rPr lang="en-US" dirty="0"/>
+              <a:t> outside of the classroom is allowed because Generative AI can enhance learning by providing multiple ways to engage with the content and skills developed in this class.</a:t>
+            </a:r>
+          </a:p>
+          <a:p>
+            <a:pPr lvl="1"/>
+            <a:r>
+              <a:rPr lang="en-US" dirty="0"/>
+              <a:t>Help with </a:t>
+            </a:r>
+            <a:r>
+              <a:rPr lang="en-US" b="1" dirty="0"/>
+              <a:t>coding for assignments</a:t>
+            </a:r>
+            <a:r>
+              <a:rPr lang="en-US" dirty="0"/>
+              <a:t>. Most algorithms in this course are quite simple, and you should try to implement them first by yourself. Use AI to provide glue code and for debugging. Be careful. AI chatbots are often inaccurate and sometimes produce incorrect answers. You are responsible for checking the accuracy before using the code.</a:t>
+            </a:r>
+          </a:p>
+          <a:p>
+            <a:pPr lvl="1"/>
+            <a:r>
+              <a:rPr lang="en-US" dirty="0"/>
+              <a:t>You are </a:t>
+            </a:r>
+            <a:r>
+              <a:rPr lang="en-US" b="1" dirty="0"/>
+              <a:t>not allowed to use AI tools to write your assignment report</a:t>
+            </a:r>
+            <a:r>
+              <a:rPr lang="en-US" dirty="0"/>
+              <a:t>. </a:t>
+            </a:r>
+          </a:p>
+          <a:p>
+            <a:pPr lvl="1"/>
+            <a:r>
+              <a:rPr lang="en-US" b="1" dirty="0"/>
+              <a:t>Specific AI-use guidelines </a:t>
+            </a:r>
+            <a:r>
+              <a:rPr lang="en-US" dirty="0"/>
+              <a:t>may be part of the assignment description.</a:t>
+            </a:r>
+          </a:p>
+          <a:p>
+            <a:endParaRPr lang="en-US" dirty="0"/>
+          </a:p>
+        </p:txBody>
+      </p:sp>
+    </p:spTree>
+    <p:extLst>
+      <p:ext uri="{BB962C8B-B14F-4D97-AF65-F5344CB8AC3E}">
+        <p14:creationId xmlns:p14="http://schemas.microsoft.com/office/powerpoint/2010/main" val="2148102371"/>
+      </p:ext>
+    </p:extLst>
+  </p:cSld>
+  <p:clrMapOvr>
+    <a:masterClrMapping/>
+  </p:clrMapOvr>
+</p:sld>
+</file>
+
+<file path=ppt/slides/slide7.xml><?xml version="1.0" encoding="utf-8"?>
+<p:sld xmlns:a="http://schemas.openxmlformats.org/drawingml/2006/main" xmlns:r="http://schemas.openxmlformats.org/officeDocument/2006/relationships" xmlns:p="http://schemas.openxmlformats.org/presentationml/2006/main">
+  <p:cSld>
+    <p:spTree>
+      <p:nvGrpSpPr>
+        <p:cNvPr id="1" name=""/>
+        <p:cNvGrpSpPr/>
+        <p:nvPr/>
+      </p:nvGrpSpPr>
+      <p:grpSpPr>
+        <a:xfrm>
+          <a:off x="0" y="0"/>
+          <a:ext cx="0" cy="0"/>
+          <a:chOff x="0" y="0"/>
+          <a:chExt cx="0" cy="0"/>
+        </a:xfrm>
+      </p:grpSpPr>
+      <p:sp>
+        <p:nvSpPr>
+          <p:cNvPr id="2" name="object 2"/>
+          <p:cNvSpPr txBox="1">
+            <a:spLocks noGrp="1"/>
+          </p:cNvSpPr>
+          <p:nvPr>
+            <p:ph type="title"/>
+          </p:nvPr>
+        </p:nvSpPr>
+        <p:spPr>
+          <a:xfrm>
+            <a:off x="838200" y="387813"/>
+            <a:ext cx="10515600" cy="713698"/>
+          </a:xfrm>
+          <a:prstGeom prst="rect">
+            <a:avLst/>
+          </a:prstGeom>
+        </p:spPr>
+        <p:txBody>
+          <a:bodyPr vert="horz" wrap="square" lIns="0" tIns="36236" rIns="0" bIns="0" rtlCol="0" anchor="ctr">
+            <a:spAutoFit/>
+          </a:bodyPr>
+          <a:lstStyle/>
+          <a:p>
+            <a:pPr marL="26841">
+              <a:lnSpc>
+                <a:spcPct val="100000"/>
+              </a:lnSpc>
+              <a:spcBef>
+                <a:spcPts val="285"/>
+              </a:spcBef>
+            </a:pPr>
+            <a:r>
+              <a:rPr spc="-127" dirty="0"/>
+              <a:t>Recommended</a:t>
+            </a:r>
+            <a:r>
+              <a:rPr spc="-95" dirty="0"/>
+              <a:t> </a:t>
+            </a:r>
+            <a:r>
+              <a:rPr lang="en-US" spc="-53" dirty="0"/>
+              <a:t>Readings</a:t>
+            </a:r>
+            <a:endParaRPr spc="-53" dirty="0"/>
+          </a:p>
+        </p:txBody>
+      </p:sp>
+      <p:sp>
+        <p:nvSpPr>
+          <p:cNvPr id="7" name="Content Placeholder 6">
+            <a:extLst>
+              <a:ext uri="{FF2B5EF4-FFF2-40B4-BE49-F238E27FC236}">
+                <a16:creationId xmlns:a16="http://schemas.microsoft.com/office/drawing/2014/main" id="{C6E550D2-23C5-937B-ED14-A0F805827A1B}"/>
+              </a:ext>
+            </a:extLst>
+          </p:cNvPr>
+          <p:cNvSpPr>
+            <a:spLocks noGrp="1"/>
+          </p:cNvSpPr>
+          <p:nvPr>
+            <p:ph idx="1"/>
+          </p:nvPr>
+        </p:nvSpPr>
+        <p:spPr/>
+        <p:txBody>
+          <a:bodyPr>
+            <a:normAutofit/>
+          </a:bodyPr>
+          <a:lstStyle/>
+          <a:p>
+            <a:pPr>
+              <a:spcBef>
+                <a:spcPts val="602"/>
+              </a:spcBef>
+            </a:pPr>
+            <a:r>
+              <a:rPr lang="en-US" dirty="0"/>
+              <a:t>Richard S. Sutton, Andrew G. Barto, </a:t>
+            </a:r>
+            <a:br>
+              <a:rPr lang="en-US" dirty="0"/>
+            </a:br>
+            <a:r>
+              <a:rPr lang="en-US" i="1" dirty="0">
+                <a:hlinkClick r:id="rId2"/>
+              </a:rPr>
+              <a:t>Reinforcement Learning: An Introduction</a:t>
+            </a:r>
+            <a:r>
+              <a:rPr lang="en-US" dirty="0">
+                <a:hlinkClick r:id="rId2"/>
+              </a:rPr>
+              <a:t>,</a:t>
+            </a:r>
+            <a:r>
+              <a:rPr lang="en-US" dirty="0"/>
+              <a:t> </a:t>
+            </a:r>
+            <a:br>
+              <a:rPr lang="en-US" dirty="0"/>
+            </a:br>
+            <a:r>
+              <a:rPr lang="en-US" dirty="0"/>
+              <a:t>2nd edition, MIT Press, Cambridge, MA, 2018.</a:t>
+            </a:r>
+          </a:p>
+          <a:p>
+            <a:pPr>
+              <a:spcBef>
+                <a:spcPts val="1279"/>
+              </a:spcBef>
+            </a:pPr>
+            <a:endParaRPr lang="en-US" dirty="0"/>
+          </a:p>
+          <a:p>
+            <a:pPr>
+              <a:spcBef>
+                <a:spcPts val="1279"/>
+              </a:spcBef>
+            </a:pPr>
+            <a:r>
+              <a:rPr lang="en-US" dirty="0"/>
+              <a:t>Vincent François-Lavet, Peter Henderson, </a:t>
+            </a:r>
+            <a:r>
+              <a:rPr lang="en-US" dirty="0" err="1"/>
+              <a:t>Riashat</a:t>
+            </a:r>
+            <a:r>
+              <a:rPr lang="en-US" dirty="0"/>
+              <a:t> Islam, Marc G. Bellemare and Joelle Pineau, </a:t>
+            </a:r>
+            <a:br>
+              <a:rPr lang="en-US" dirty="0"/>
+            </a:br>
+            <a:r>
+              <a:rPr lang="en-US" dirty="0">
+                <a:hlinkClick r:id="rId3"/>
+              </a:rPr>
+              <a:t>An Introduction to Deep Reinforcement Learning,</a:t>
+            </a:r>
+            <a:r>
+              <a:rPr lang="en-US" dirty="0"/>
+              <a:t> </a:t>
+            </a:r>
+            <a:br>
+              <a:rPr lang="en-US" dirty="0"/>
+            </a:br>
+            <a:r>
+              <a:rPr lang="en-US" i="1" dirty="0"/>
+              <a:t>Foundations and Trends in Machine Learning</a:t>
+            </a:r>
+            <a:r>
+              <a:rPr lang="en-US" dirty="0"/>
+              <a:t>, 11:3-4, pp 219-354, 2018.</a:t>
+            </a:r>
+          </a:p>
+        </p:txBody>
+      </p:sp>
+    </p:spTree>
+  </p:cSld>
+  <p:clrMapOvr>
+    <a:masterClrMapping/>
+  </p:clrMapOvr>
+  <p:transition>
+    <p:cut/>
+  </p:transition>
+</p:sld>
+</file>
+
+<file path=ppt/slides/slide8.xml><?xml version="1.0" encoding="utf-8"?>
+<p:sld xmlns:a="http://schemas.openxmlformats.org/drawingml/2006/main" xmlns:r="http://schemas.openxmlformats.org/officeDocument/2006/relationships" xmlns:p="http://schemas.openxmlformats.org/presentationml/2006/main">
+  <p:cSld>
+    <p:bg>
+      <p:bgPr>
+        <a:solidFill>
+          <a:schemeClr val="bg1"/>
+        </a:solidFill>
+        <a:effectLst/>
+      </p:bgPr>
+    </p:bg>
+    <p:spTree>
+      <p:nvGrpSpPr>
+        <p:cNvPr id="1" name=""/>
+        <p:cNvGrpSpPr/>
+        <p:nvPr/>
+      </p:nvGrpSpPr>
+      <p:grpSpPr>
+        <a:xfrm>
+          <a:off x="0" y="0"/>
+          <a:ext cx="0" cy="0"/>
+          <a:chOff x="0" y="0"/>
+          <a:chExt cx="0" cy="0"/>
+        </a:xfrm>
+      </p:grpSpPr>
+      <p:sp useBgFill="1">
+        <p:nvSpPr>
+          <p:cNvPr id="9" name="Rectangle 8">
+            <a:extLst>
+              <a:ext uri="{FF2B5EF4-FFF2-40B4-BE49-F238E27FC236}">
+                <a16:creationId xmlns:a16="http://schemas.microsoft.com/office/drawing/2014/main" id="{F13C74B1-5B17-4795-BED0-7140497B445A}"/>
+              </a:ext>
+              <a:ext uri="{C183D7F6-B498-43B3-948B-1728B52AA6E4}">
+                <adec:decorative xmlns:adec="http://schemas.microsoft.com/office/drawing/2017/decorative" val="1"/>
+              </a:ext>
+            </a:extLst>
+          </p:cNvPr>
+          <p:cNvSpPr>
+            <a:spLocks noGrp="1" noRot="1" noChangeAspect="1" noMove="1" noResize="1" noEditPoints="1" noAdjustHandles="1" noChangeArrowheads="1" noChangeShapeType="1" noTextEdit="1"/>
+          </p:cNvSpPr>
+          <p:nvPr>
+            <p:extLst>
+              <p:ext uri="{386F3935-93C4-4BCD-93E2-E3B085C9AB24}">
+                <p16:designElem xmlns:p16="http://schemas.microsoft.com/office/powerpoint/2015/main" val="1"/>
+              </p:ext>
+            </p:extLst>
+          </p:nvPr>
+        </p:nvSpPr>
+        <p:spPr>
+          <a:xfrm>
+            <a:off x="0" y="0"/>
+            <a:ext cx="12188952" cy="6858000"/>
+          </a:xfrm>
+          <a:prstGeom prst="rect">
+            <a:avLst/>
+          </a:prstGeom>
+          <a:ln>
+            <a:noFill/>
+          </a:ln>
+        </p:spPr>
+        <p:style>
+          <a:lnRef idx="2">
+            <a:schemeClr val="accent1">
+              <a:shade val="50000"/>
+            </a:schemeClr>
+          </a:lnRef>
+          <a:fillRef idx="1">
+            <a:schemeClr val="accent1"/>
+          </a:fillRef>
+          <a:effectRef idx="0">
+            <a:schemeClr val="accent1"/>
+          </a:effectRef>
+          <a:fontRef idx="minor">
+            <a:schemeClr val="lt1"/>
+          </a:fontRef>
+        </p:style>
+        <p:txBody>
+          <a:bodyPr rtlCol="0" anchor="ctr"/>
+          <a:lstStyle/>
+          <a:p>
+            <a:pPr algn="ctr"/>
+            <a:endParaRPr lang="en-US"/>
+          </a:p>
+        </p:txBody>
+      </p:sp>
+      <p:sp>
+        <p:nvSpPr>
+          <p:cNvPr id="2" name="Title 1">
+            <a:extLst>
+              <a:ext uri="{FF2B5EF4-FFF2-40B4-BE49-F238E27FC236}">
+                <a16:creationId xmlns:a16="http://schemas.microsoft.com/office/drawing/2014/main" id="{640B0874-44AF-8EFD-BCBB-851D6F009CA7}"/>
+              </a:ext>
+            </a:extLst>
+          </p:cNvPr>
+          <p:cNvSpPr>
+            <a:spLocks noGrp="1"/>
+          </p:cNvSpPr>
+          <p:nvPr>
+            <p:ph type="title"/>
+          </p:nvPr>
+        </p:nvSpPr>
+        <p:spPr>
+          <a:xfrm>
+            <a:off x="640080" y="325369"/>
+            <a:ext cx="4368602" cy="1956841"/>
+          </a:xfrm>
+        </p:spPr>
+        <p:txBody>
+          <a:bodyPr anchor="b">
+            <a:normAutofit/>
+          </a:bodyPr>
+          <a:lstStyle/>
+          <a:p>
+            <a:r>
+              <a:rPr lang="en-US" sz="4600"/>
+              <a:t>To Be Successful you need…</a:t>
+            </a:r>
+          </a:p>
+        </p:txBody>
+      </p:sp>
+      <p:sp>
+        <p:nvSpPr>
+          <p:cNvPr id="14" name="sketchy line">
+            <a:extLst>
+              <a:ext uri="{FF2B5EF4-FFF2-40B4-BE49-F238E27FC236}">
+                <a16:creationId xmlns:a16="http://schemas.microsoft.com/office/drawing/2014/main" id="{D4974D33-8DC5-464E-8C6D-BE58F0669C17}"/>
+              </a:ext>
+              <a:ext uri="{C183D7F6-B498-43B3-948B-1728B52AA6E4}">
+                <adec:decorative xmlns:adec="http://schemas.microsoft.com/office/drawing/2017/decorative" val="1"/>
+              </a:ext>
+            </a:extLst>
+          </p:cNvPr>
+          <p:cNvSpPr>
+            <a:spLocks noGrp="1" noRot="1" noChangeAspect="1" noMove="1" noResize="1" noEditPoints="1" noAdjustHandles="1" noChangeArrowheads="1" noChangeShapeType="1" noTextEdit="1"/>
+          </p:cNvSpPr>
+          <p:nvPr>
+            <p:extLst>
+              <p:ext uri="{386F3935-93C4-4BCD-93E2-E3B085C9AB24}">
+                <p16:designElem xmlns:p16="http://schemas.microsoft.com/office/powerpoint/2015/main" val="1"/>
+              </p:ext>
+            </p:extLst>
+          </p:nvPr>
+        </p:nvSpPr>
+        <p:spPr>
+          <a:xfrm>
+            <a:off x="640080" y="2586994"/>
+            <a:ext cx="3474720" cy="18288"/>
+          </a:xfrm>
+          <a:custGeom>
+            <a:avLst/>
+            <a:gdLst>
+              <a:gd name="csX0" fmla="*/ 0 w 3474720"/>
+              <a:gd name="csY0" fmla="*/ 0 h 18288"/>
+              <a:gd name="csX1" fmla="*/ 694944 w 3474720"/>
+              <a:gd name="csY1" fmla="*/ 0 h 18288"/>
+              <a:gd name="csX2" fmla="*/ 1355141 w 3474720"/>
+              <a:gd name="csY2" fmla="*/ 0 h 18288"/>
+              <a:gd name="csX3" fmla="*/ 2015338 w 3474720"/>
+              <a:gd name="csY3" fmla="*/ 0 h 18288"/>
+              <a:gd name="csX4" fmla="*/ 2779776 w 3474720"/>
+              <a:gd name="csY4" fmla="*/ 0 h 18288"/>
+              <a:gd name="csX5" fmla="*/ 3474720 w 3474720"/>
+              <a:gd name="csY5" fmla="*/ 0 h 18288"/>
+              <a:gd name="csX6" fmla="*/ 3474720 w 3474720"/>
+              <a:gd name="csY6" fmla="*/ 18288 h 18288"/>
+              <a:gd name="csX7" fmla="*/ 2779776 w 3474720"/>
+              <a:gd name="csY7" fmla="*/ 18288 h 18288"/>
+              <a:gd name="csX8" fmla="*/ 2189074 w 3474720"/>
+              <a:gd name="csY8" fmla="*/ 18288 h 18288"/>
+              <a:gd name="csX9" fmla="*/ 1528877 w 3474720"/>
+              <a:gd name="csY9" fmla="*/ 18288 h 18288"/>
+              <a:gd name="csX10" fmla="*/ 868680 w 3474720"/>
+              <a:gd name="csY10" fmla="*/ 18288 h 18288"/>
+              <a:gd name="csX11" fmla="*/ 0 w 3474720"/>
+              <a:gd name="csY11" fmla="*/ 18288 h 18288"/>
+              <a:gd name="csX12" fmla="*/ 0 w 3474720"/>
+              <a:gd name="csY12" fmla="*/ 0 h 18288"/>
+            </a:gdLst>
+            <a:ahLst/>
+            <a:cxnLst>
+              <a:cxn ang="0">
+                <a:pos x="csX0" y="csY0"/>
+              </a:cxn>
+              <a:cxn ang="0">
+                <a:pos x="csX1" y="csY1"/>
+              </a:cxn>
+              <a:cxn ang="0">
+                <a:pos x="csX2" y="csY2"/>
+              </a:cxn>
+              <a:cxn ang="0">
+                <a:pos x="csX3" y="csY3"/>
+              </a:cxn>
+              <a:cxn ang="0">
+                <a:pos x="csX4" y="csY4"/>
+              </a:cxn>
+              <a:cxn ang="0">
+                <a:pos x="csX5" y="csY5"/>
+              </a:cxn>
+              <a:cxn ang="0">
+                <a:pos x="csX6" y="csY6"/>
+              </a:cxn>
+              <a:cxn ang="0">
+                <a:pos x="csX7" y="csY7"/>
+              </a:cxn>
+              <a:cxn ang="0">
+                <a:pos x="csX8" y="csY8"/>
+              </a:cxn>
+              <a:cxn ang="0">
+                <a:pos x="csX9" y="csY9"/>
+              </a:cxn>
+              <a:cxn ang="0">
+                <a:pos x="csX10" y="csY10"/>
+              </a:cxn>
+              <a:cxn ang="0">
+                <a:pos x="csX11" y="csY11"/>
+              </a:cxn>
+              <a:cxn ang="0">
+                <a:pos x="csX12" y="csY12"/>
+              </a:cxn>
+            </a:cxnLst>
+            <a:rect l="l" t="t" r="r" b="b"/>
+            <a:pathLst>
+              <a:path w="3474720" h="18288" fill="none" extrusionOk="0">
+                <a:moveTo>
+                  <a:pt x="0" y="0"/>
+                </a:moveTo>
+                <a:cubicBezTo>
+                  <a:pt x="224454" y="-14544"/>
+                  <a:pt x="495407" y="26540"/>
+                  <a:pt x="694944" y="0"/>
+                </a:cubicBezTo>
+                <a:cubicBezTo>
+                  <a:pt x="894481" y="-26540"/>
+                  <a:pt x="1130063" y="24713"/>
+                  <a:pt x="1355141" y="0"/>
+                </a:cubicBezTo>
+                <a:cubicBezTo>
+                  <a:pt x="1580219" y="-24713"/>
+                  <a:pt x="1820099" y="26695"/>
+                  <a:pt x="2015338" y="0"/>
+                </a:cubicBezTo>
+                <a:cubicBezTo>
+                  <a:pt x="2210577" y="-26695"/>
+                  <a:pt x="2402045" y="165"/>
+                  <a:pt x="2779776" y="0"/>
+                </a:cubicBezTo>
+                <a:cubicBezTo>
+                  <a:pt x="3157507" y="-165"/>
+                  <a:pt x="3286859" y="-15571"/>
+                  <a:pt x="3474720" y="0"/>
+                </a:cubicBezTo>
+                <a:cubicBezTo>
+                  <a:pt x="3474286" y="7551"/>
+                  <a:pt x="3474253" y="9822"/>
+                  <a:pt x="3474720" y="18288"/>
+                </a:cubicBezTo>
+                <a:cubicBezTo>
+                  <a:pt x="3233904" y="29845"/>
+                  <a:pt x="2945134" y="-5256"/>
+                  <a:pt x="2779776" y="18288"/>
+                </a:cubicBezTo>
+                <a:cubicBezTo>
+                  <a:pt x="2614418" y="41832"/>
+                  <a:pt x="2339768" y="22709"/>
+                  <a:pt x="2189074" y="18288"/>
+                </a:cubicBezTo>
+                <a:cubicBezTo>
+                  <a:pt x="2038380" y="13867"/>
+                  <a:pt x="1817434" y="-4947"/>
+                  <a:pt x="1528877" y="18288"/>
+                </a:cubicBezTo>
+                <a:cubicBezTo>
+                  <a:pt x="1240320" y="41523"/>
+                  <a:pt x="1042447" y="37198"/>
+                  <a:pt x="868680" y="18288"/>
+                </a:cubicBezTo>
+                <a:cubicBezTo>
+                  <a:pt x="694913" y="-622"/>
+                  <a:pt x="233232" y="44909"/>
+                  <a:pt x="0" y="18288"/>
+                </a:cubicBezTo>
+                <a:cubicBezTo>
+                  <a:pt x="60" y="11696"/>
+                  <a:pt x="66" y="3758"/>
+                  <a:pt x="0" y="0"/>
+                </a:cubicBezTo>
+                <a:close/>
+              </a:path>
+              <a:path w="3474720" h="18288" stroke="0" extrusionOk="0">
+                <a:moveTo>
+                  <a:pt x="0" y="0"/>
+                </a:moveTo>
+                <a:cubicBezTo>
+                  <a:pt x="202328" y="-14716"/>
+                  <a:pt x="332722" y="-11499"/>
+                  <a:pt x="625450" y="0"/>
+                </a:cubicBezTo>
+                <a:cubicBezTo>
+                  <a:pt x="918178" y="11499"/>
+                  <a:pt x="1096688" y="5123"/>
+                  <a:pt x="1389888" y="0"/>
+                </a:cubicBezTo>
+                <a:cubicBezTo>
+                  <a:pt x="1683088" y="-5123"/>
+                  <a:pt x="1835981" y="-14038"/>
+                  <a:pt x="1980590" y="0"/>
+                </a:cubicBezTo>
+                <a:cubicBezTo>
+                  <a:pt x="2125199" y="14038"/>
+                  <a:pt x="2396099" y="-7203"/>
+                  <a:pt x="2571293" y="0"/>
+                </a:cubicBezTo>
+                <a:cubicBezTo>
+                  <a:pt x="2746487" y="7203"/>
+                  <a:pt x="3041609" y="-12036"/>
+                  <a:pt x="3474720" y="0"/>
+                </a:cubicBezTo>
+                <a:cubicBezTo>
+                  <a:pt x="3474638" y="4406"/>
+                  <a:pt x="3474631" y="9982"/>
+                  <a:pt x="3474720" y="18288"/>
+                </a:cubicBezTo>
+                <a:cubicBezTo>
+                  <a:pt x="3324873" y="21876"/>
+                  <a:pt x="3136771" y="12587"/>
+                  <a:pt x="2814523" y="18288"/>
+                </a:cubicBezTo>
+                <a:cubicBezTo>
+                  <a:pt x="2492275" y="23989"/>
+                  <a:pt x="2294402" y="47111"/>
+                  <a:pt x="2154326" y="18288"/>
+                </a:cubicBezTo>
+                <a:cubicBezTo>
+                  <a:pt x="2014250" y="-10535"/>
+                  <a:pt x="1820317" y="33903"/>
+                  <a:pt x="1494130" y="18288"/>
+                </a:cubicBezTo>
+                <a:cubicBezTo>
+                  <a:pt x="1167943" y="2673"/>
+                  <a:pt x="948432" y="14868"/>
+                  <a:pt x="729691" y="18288"/>
+                </a:cubicBezTo>
+                <a:cubicBezTo>
+                  <a:pt x="510950" y="21708"/>
+                  <a:pt x="264032" y="24354"/>
+                  <a:pt x="0" y="18288"/>
+                </a:cubicBezTo>
+                <a:cubicBezTo>
+                  <a:pt x="189" y="14288"/>
+                  <a:pt x="-703" y="3747"/>
+                  <a:pt x="0" y="0"/>
+                </a:cubicBezTo>
+                <a:close/>
+              </a:path>
+            </a:pathLst>
+          </a:custGeom>
+          <a:solidFill>
+            <a:schemeClr val="accent2"/>
+          </a:solidFill>
+          <a:ln w="44450" cap="rnd">
+            <a:solidFill>
+              <a:schemeClr val="accent2"/>
+            </a:solidFill>
+            <a:round/>
+            <a:extLst>
+              <a:ext uri="{C807C97D-BFC1-408E-A445-0C87EB9F89A2}">
+                <ask:lineSketchStyleProps xmlns:ask="http://schemas.microsoft.com/office/drawing/2018/sketchyshapes" sd="2863741219">
+                  <a:prstGeom prst="rect">
+                    <a:avLst/>
+                  </a:prstGeom>
+                  <ask:type>
+                    <ask:lineSketchFreehand/>
+                  </ask:type>
+                </ask:lineSketchStyleProps>
+              </a:ext>
+            </a:extLst>
+          </a:ln>
+        </p:spPr>
+        <p:style>
+          <a:lnRef idx="2">
+            <a:schemeClr val="accent1">
+              <a:shade val="50000"/>
+            </a:schemeClr>
+          </a:lnRef>
+          <a:fillRef idx="1">
+            <a:schemeClr val="accent1"/>
+          </a:fillRef>
+          <a:effectRef idx="0">
+            <a:schemeClr val="accent1"/>
+          </a:effectRef>
+          <a:fontRef idx="minor">
+            <a:schemeClr val="lt1"/>
+          </a:fontRef>
+        </p:style>
+        <p:txBody>
+          <a:bodyPr rtlCol="0" anchor="ctr"/>
+          <a:lstStyle/>
+          <a:p>
+            <a:pPr algn="ctr"/>
+            <a:endParaRPr lang="en-US"/>
+          </a:p>
+        </p:txBody>
+      </p:sp>
+      <p:sp>
+        <p:nvSpPr>
+          <p:cNvPr id="3" name="Content Placeholder 2">
+            <a:extLst>
+              <a:ext uri="{FF2B5EF4-FFF2-40B4-BE49-F238E27FC236}">
+                <a16:creationId xmlns:a16="http://schemas.microsoft.com/office/drawing/2014/main" id="{67A487AD-771D-8DAA-546E-E45BEF6D9AB6}"/>
+              </a:ext>
+            </a:extLst>
+          </p:cNvPr>
+          <p:cNvSpPr>
+            <a:spLocks noGrp="1"/>
+          </p:cNvSpPr>
+          <p:nvPr>
+            <p:ph idx="1"/>
+          </p:nvPr>
+        </p:nvSpPr>
+        <p:spPr>
+          <a:xfrm>
+            <a:off x="640081" y="2872899"/>
+            <a:ext cx="4753488" cy="3320668"/>
+          </a:xfrm>
+        </p:spPr>
+        <p:txBody>
+          <a:bodyPr>
+            <a:normAutofit/>
+          </a:bodyPr>
+          <a:lstStyle/>
+          <a:p>
+            <a:r>
+              <a:rPr lang="en-US" sz="1400" dirty="0"/>
               <a:t>Proficiency in </a:t>
             </a:r>
             <a:r>
-              <a:rPr lang="en-US" b="1" dirty="0"/>
+              <a:rPr lang="en-US" sz="1400" b="1" dirty="0"/>
               <a:t>Python</a:t>
             </a:r>
             <a:r>
-              <a:rPr lang="en-US" dirty="0"/>
+              <a:rPr lang="en-US" sz="1400" dirty="0"/>
               <a:t> programming.</a:t>
             </a:r>
           </a:p>
           <a:p>
-            <a:endParaRPr lang="en-US" dirty="0"/>
-          </a:p>
-          <a:p>
-            <a:r>
-              <a:rPr lang="en-US" dirty="0"/>
+            <a:endParaRPr lang="en-US" sz="1400" dirty="0"/>
+          </a:p>
+          <a:p>
+            <a:r>
+              <a:rPr lang="en-US" sz="1400" dirty="0"/>
               <a:t>Familiarity with </a:t>
             </a:r>
             <a:r>
-              <a:rPr lang="en-US" b="1" dirty="0"/>
+              <a:rPr lang="en-US" sz="1400" b="1" dirty="0"/>
               <a:t>artificial intelligence</a:t>
             </a:r>
             <a:r>
-              <a:rPr lang="en-US" dirty="0"/>
+              <a:rPr lang="en-US" sz="1400" dirty="0"/>
               <a:t> fundamentals, including intelligent agents and search.</a:t>
             </a:r>
           </a:p>
           <a:p>
-            <a:endParaRPr lang="en-US" dirty="0"/>
-          </a:p>
-          <a:p>
-            <a:r>
-              <a:rPr lang="en-US" dirty="0"/>
+            <a:endParaRPr lang="en-US" sz="1400" dirty="0"/>
+          </a:p>
+          <a:p>
+            <a:r>
+              <a:rPr lang="en-US" sz="1400" dirty="0"/>
               <a:t>Knowledge of </a:t>
             </a:r>
             <a:r>
-              <a:rPr lang="en-US" b="1" dirty="0"/>
+              <a:rPr lang="en-US" sz="1400" b="1" dirty="0"/>
               <a:t>machine learning </a:t>
             </a:r>
             <a:r>
-              <a:rPr lang="en-US" dirty="0"/>
+              <a:rPr lang="en-US" sz="1400" dirty="0"/>
               <a:t>(e.g., supervised learning, deep learning, model evaluation).</a:t>
             </a:r>
           </a:p>
           <a:p>
-            <a:endParaRPr lang="en-US" dirty="0"/>
-          </a:p>
-          <a:p>
-            <a:r>
-              <a:rPr lang="en-US"/>
+            <a:endParaRPr lang="en-US" sz="1400" dirty="0"/>
+          </a:p>
+          <a:p>
+            <a:r>
+              <a:rPr lang="en-US" sz="1400" dirty="0"/>
               <a:t>Knowledge of </a:t>
             </a:r>
             <a:r>
-              <a:rPr lang="en-US" b="1"/>
-              <a:t>math </a:t>
-            </a:r>
-            <a:r>
-              <a:rPr lang="en-US" b="1" dirty="0"/>
-              <a:t>and probability theory </a:t>
-            </a:r>
-            <a:r>
-              <a:rPr lang="en-US" dirty="0"/>
+              <a:rPr lang="en-US" sz="1400" b="1" dirty="0"/>
+              <a:t>math and probability theory </a:t>
+            </a:r>
+            <a:r>
+              <a:rPr lang="en-US" sz="1400" dirty="0"/>
               <a:t>(probability, expectation)</a:t>
             </a:r>
           </a:p>
@@ -7888,10 +8722,172 @@
             <a:pPr marL="0" indent="0">
               <a:buNone/>
             </a:pPr>
-            <a:endParaRPr lang="en-US" dirty="0"/>
+            <a:endParaRPr lang="en-US" sz="1400" dirty="0"/>
           </a:p>
         </p:txBody>
       </p:sp>
+      <p:pic>
+        <p:nvPicPr>
+          <p:cNvPr id="4" name="Picture 3">
+            <a:extLst>
+              <a:ext uri="{FF2B5EF4-FFF2-40B4-BE49-F238E27FC236}">
+                <a16:creationId xmlns:a16="http://schemas.microsoft.com/office/drawing/2014/main" id="{16372A63-7E7A-05CB-D20C-38E7F3650F08}"/>
+              </a:ext>
+              <a:ext uri="{C183D7F6-B498-43B3-948B-1728B52AA6E4}">
+                <adec:decorative xmlns:adec="http://schemas.microsoft.com/office/drawing/2017/decorative" val="1"/>
+              </a:ext>
+            </a:extLst>
+          </p:cNvPr>
+          <p:cNvPicPr>
+            <a:picLocks noChangeAspect="1" noChangeArrowheads="1"/>
+          </p:cNvPicPr>
+          <p:nvPr/>
+        </p:nvPicPr>
+        <p:blipFill rotWithShape="1">
+          <a:blip r:embed="rId2">
+            <a:extLst>
+              <a:ext uri="{28A0092B-C50C-407E-A947-70E740481C1C}">
+                <a14:useLocalDpi xmlns:a14="http://schemas.microsoft.com/office/drawing/2010/main" val="0"/>
+              </a:ext>
+            </a:extLst>
+          </a:blip>
+          <a:srcRect l="4875" r="28172" b="-1"/>
+          <a:stretch>
+            <a:fillRect/>
+          </a:stretch>
+        </p:blipFill>
+        <p:spPr bwMode="auto">
+          <a:xfrm>
+            <a:off x="5311702" y="10"/>
+            <a:ext cx="6878775" cy="6857990"/>
+          </a:xfrm>
+          <a:custGeom>
+            <a:avLst/>
+            <a:gdLst/>
+            <a:ahLst/>
+            <a:cxnLst/>
+            <a:rect l="l" t="t" r="r" b="b"/>
+            <a:pathLst>
+              <a:path w="6878775" h="6858000">
+                <a:moveTo>
+                  <a:pt x="1102973" y="0"/>
+                </a:moveTo>
+                <a:lnTo>
+                  <a:pt x="1160688" y="0"/>
+                </a:lnTo>
+                <a:lnTo>
+                  <a:pt x="983189" y="331786"/>
+                </a:lnTo>
+                <a:cubicBezTo>
+                  <a:pt x="914866" y="469145"/>
+                  <a:pt x="850355" y="608712"/>
+                  <a:pt x="789261" y="750263"/>
+                </a:cubicBezTo>
+                <a:cubicBezTo>
+                  <a:pt x="774307" y="784928"/>
+                  <a:pt x="759992" y="819849"/>
+                  <a:pt x="745295" y="854514"/>
+                </a:cubicBezTo>
+                <a:cubicBezTo>
+                  <a:pt x="756682" y="845393"/>
+                  <a:pt x="765489" y="833492"/>
+                  <a:pt x="770857" y="819975"/>
+                </a:cubicBezTo>
+                <a:cubicBezTo>
+                  <a:pt x="879943" y="589569"/>
+                  <a:pt x="999605" y="365513"/>
+                  <a:pt x="1131329" y="148742"/>
+                </a:cubicBezTo>
+                <a:lnTo>
+                  <a:pt x="1227589" y="0"/>
+                </a:lnTo>
+                <a:lnTo>
+                  <a:pt x="6878775" y="0"/>
+                </a:lnTo>
+                <a:lnTo>
+                  <a:pt x="6878775" y="6858000"/>
+                </a:lnTo>
+                <a:lnTo>
+                  <a:pt x="713521" y="6858000"/>
+                </a:lnTo>
+                <a:lnTo>
+                  <a:pt x="625642" y="6670527"/>
+                </a:lnTo>
+                <a:cubicBezTo>
+                  <a:pt x="507232" y="6398531"/>
+                  <a:pt x="403083" y="6118381"/>
+                  <a:pt x="312785" y="5830359"/>
+                </a:cubicBezTo>
+                <a:cubicBezTo>
+                  <a:pt x="278149" y="5719759"/>
+                  <a:pt x="248879" y="5607635"/>
+                  <a:pt x="212198" y="5480401"/>
+                </a:cubicBezTo>
+                <a:cubicBezTo>
+                  <a:pt x="212208" y="5491601"/>
+                  <a:pt x="212803" y="5502788"/>
+                  <a:pt x="213988" y="5513923"/>
+                </a:cubicBezTo>
+                <a:cubicBezTo>
+                  <a:pt x="264089" y="5723695"/>
+                  <a:pt x="307290" y="5935370"/>
+                  <a:pt x="365826" y="6142729"/>
+                </a:cubicBezTo>
+                <a:cubicBezTo>
+                  <a:pt x="433152" y="6380817"/>
+                  <a:pt x="510068" y="6614016"/>
+                  <a:pt x="597975" y="6841549"/>
+                </a:cubicBezTo>
+                <a:lnTo>
+                  <a:pt x="604824" y="6858000"/>
+                </a:lnTo>
+                <a:lnTo>
+                  <a:pt x="552056" y="6858000"/>
+                </a:lnTo>
+                <a:lnTo>
+                  <a:pt x="539576" y="6828295"/>
+                </a:lnTo>
+                <a:cubicBezTo>
+                  <a:pt x="380597" y="6414594"/>
+                  <a:pt x="260223" y="5988893"/>
+                  <a:pt x="171555" y="5552906"/>
+                </a:cubicBezTo>
+                <a:cubicBezTo>
+                  <a:pt x="91163" y="5157998"/>
+                  <a:pt x="43746" y="4758899"/>
+                  <a:pt x="12305" y="4357388"/>
+                </a:cubicBezTo>
+                <a:cubicBezTo>
+                  <a:pt x="-14281" y="4013908"/>
+                  <a:pt x="4507" y="3672965"/>
+                  <a:pt x="46684" y="3331516"/>
+                </a:cubicBezTo>
+                <a:cubicBezTo>
+                  <a:pt x="127203" y="2664286"/>
+                  <a:pt x="277819" y="2007265"/>
+                  <a:pt x="496065" y="1371196"/>
+                </a:cubicBezTo>
+                <a:cubicBezTo>
+                  <a:pt x="636273" y="966066"/>
+                  <a:pt x="800445" y="573253"/>
+                  <a:pt x="995723" y="196614"/>
+                </a:cubicBezTo>
+                <a:close/>
+              </a:path>
+            </a:pathLst>
+          </a:custGeom>
+          <a:noFill/>
+          <a:extLst>
+            <a:ext uri="{909E8E84-426E-40DD-AFC4-6F175D3DCCD1}">
+              <a14:hiddenFill xmlns:a14="http://schemas.microsoft.com/office/drawing/2010/main">
+                <a:solidFill>
+                  <a:srgbClr val="FFFFFF"/>
+                </a:solidFill>
+              </a14:hiddenFill>
+            </a:ext>
+          </a:extLst>
+        </p:spPr>
+      </p:pic>
     </p:spTree>
     <p:extLst>
       <p:ext uri="{BB962C8B-B14F-4D97-AF65-F5344CB8AC3E}">

--- a/slides/00_course_intro.pptx
+++ b/slides/00_course_intro.pptx
@@ -3284,7 +3284,7 @@
           <a:p>
             <a:fld id="{3E22BF2E-04DA-469E-97C5-BB68A0368813}" type="datetimeFigureOut">
               <a:rPr lang="en-US" smtClean="0"/>
-              <a:t>3/30/2026</a:t>
+              <a:t>4/9/2026</a:t>
             </a:fld>
             <a:endParaRPr lang="en-US"/>
           </a:p>
@@ -3482,7 +3482,7 @@
           <a:p>
             <a:fld id="{3E22BF2E-04DA-469E-97C5-BB68A0368813}" type="datetimeFigureOut">
               <a:rPr lang="en-US" smtClean="0"/>
-              <a:t>3/30/2026</a:t>
+              <a:t>4/9/2026</a:t>
             </a:fld>
             <a:endParaRPr lang="en-US"/>
           </a:p>
@@ -3690,7 +3690,7 @@
           <a:p>
             <a:fld id="{3E22BF2E-04DA-469E-97C5-BB68A0368813}" type="datetimeFigureOut">
               <a:rPr lang="en-US" smtClean="0"/>
-              <a:t>3/30/2026</a:t>
+              <a:t>4/9/2026</a:t>
             </a:fld>
             <a:endParaRPr lang="en-US"/>
           </a:p>
@@ -3898,7 +3898,7 @@
           <a:p>
             <a:fld id="{3E22BF2E-04DA-469E-97C5-BB68A0368813}" type="datetimeFigureOut">
               <a:rPr lang="en-US" smtClean="0"/>
-              <a:t>3/30/2026</a:t>
+              <a:t>4/9/2026</a:t>
             </a:fld>
             <a:endParaRPr lang="en-US"/>
           </a:p>
@@ -4173,7 +4173,7 @@
           <a:p>
             <a:fld id="{3E22BF2E-04DA-469E-97C5-BB68A0368813}" type="datetimeFigureOut">
               <a:rPr lang="en-US" smtClean="0"/>
-              <a:t>3/30/2026</a:t>
+              <a:t>4/9/2026</a:t>
             </a:fld>
             <a:endParaRPr lang="en-US"/>
           </a:p>
@@ -4438,7 +4438,7 @@
           <a:p>
             <a:fld id="{3E22BF2E-04DA-469E-97C5-BB68A0368813}" type="datetimeFigureOut">
               <a:rPr lang="en-US" smtClean="0"/>
-              <a:t>3/30/2026</a:t>
+              <a:t>4/9/2026</a:t>
             </a:fld>
             <a:endParaRPr lang="en-US"/>
           </a:p>
@@ -4850,7 +4850,7 @@
           <a:p>
             <a:fld id="{3E22BF2E-04DA-469E-97C5-BB68A0368813}" type="datetimeFigureOut">
               <a:rPr lang="en-US" smtClean="0"/>
-              <a:t>3/30/2026</a:t>
+              <a:t>4/9/2026</a:t>
             </a:fld>
             <a:endParaRPr lang="en-US"/>
           </a:p>
@@ -4991,7 +4991,7 @@
           <a:p>
             <a:fld id="{3E22BF2E-04DA-469E-97C5-BB68A0368813}" type="datetimeFigureOut">
               <a:rPr lang="en-US" smtClean="0"/>
-              <a:t>3/30/2026</a:t>
+              <a:t>4/9/2026</a:t>
             </a:fld>
             <a:endParaRPr lang="en-US"/>
           </a:p>
@@ -5104,7 +5104,7 @@
           <a:p>
             <a:fld id="{3E22BF2E-04DA-469E-97C5-BB68A0368813}" type="datetimeFigureOut">
               <a:rPr lang="en-US" smtClean="0"/>
-              <a:t>3/30/2026</a:t>
+              <a:t>4/9/2026</a:t>
             </a:fld>
             <a:endParaRPr lang="en-US"/>
           </a:p>
@@ -5415,7 +5415,7 @@
           <a:p>
             <a:fld id="{3E22BF2E-04DA-469E-97C5-BB68A0368813}" type="datetimeFigureOut">
               <a:rPr lang="en-US" smtClean="0"/>
-              <a:t>3/30/2026</a:t>
+              <a:t>4/9/2026</a:t>
             </a:fld>
             <a:endParaRPr lang="en-US"/>
           </a:p>
@@ -5703,7 +5703,7 @@
           <a:p>
             <a:fld id="{3E22BF2E-04DA-469E-97C5-BB68A0368813}" type="datetimeFigureOut">
               <a:rPr lang="en-US" smtClean="0"/>
-              <a:t>3/30/2026</a:t>
+              <a:t>4/9/2026</a:t>
             </a:fld>
             <a:endParaRPr lang="en-US"/>
           </a:p>
@@ -5944,7 +5944,7 @@
           <a:p>
             <a:fld id="{3E22BF2E-04DA-469E-97C5-BB68A0368813}" type="datetimeFigureOut">
               <a:rPr lang="en-US" smtClean="0"/>
-              <a:t>3/30/2026</a:t>
+              <a:t>4/9/2026</a:t>
             </a:fld>
             <a:endParaRPr lang="en-US"/>
           </a:p>
@@ -8338,7 +8338,19 @@
           <a:p>
             <a:r>
               <a:rPr lang="en-US" sz="4600"/>
-              <a:t>To Be Successful you need…</a:t>
+              <a:t>To Be Successful You </a:t>
+            </a:r>
+            <a:r>
+              <a:rPr lang="en-US" sz="4600" dirty="0"/>
+              <a:t>N</a:t>
+            </a:r>
+            <a:r>
+              <a:rPr lang="en-US" sz="4600"/>
+              <a:t>eed</a:t>
+            </a:r>
+            <a:r>
+              <a:rPr lang="en-US" sz="4600" dirty="0"/>
+              <a:t>…</a:t>
             </a:r>
           </a:p>
         </p:txBody>

--- a/slides/00_course_intro.pptx
+++ b/slides/00_course_intro.pptx
@@ -1052,7 +1052,7 @@
 <dgm:dataModel xmlns:dgm="http://schemas.openxmlformats.org/drawingml/2006/diagram" xmlns:a="http://schemas.openxmlformats.org/drawingml/2006/main">
   <dgm:ptLst>
     <dgm:pt modelId="{67D2D9ED-F008-4B5F-9525-3D2B5EB9B0EC}" type="doc">
-      <dgm:prSet loTypeId="urn:microsoft.com/office/officeart/2018/5/layout/IconCircleLabelList" loCatId="icon" qsTypeId="urn:microsoft.com/office/officeart/2005/8/quickstyle/simple1" qsCatId="simple" csTypeId="urn:microsoft.com/office/officeart/2018/5/colors/Iconchunking_coloredtext_colorful1" csCatId="colorful" phldr="1"/>
+      <dgm:prSet loTypeId="urn:microsoft.com/office/officeart/2018/5/layout/IconCircleLabelList" loCatId="icon" qsTypeId="urn:microsoft.com/office/officeart/2005/8/quickstyle/simple1#1" qsCatId="simple" csTypeId="urn:microsoft.com/office/officeart/2018/5/colors/Iconchunking_coloredtext_colorful1" csCatId="colorful" phldr="1"/>
       <dgm:spPr/>
       <dgm:t>
         <a:bodyPr/>
@@ -1127,7 +1127,44 @@
           </a:r>
           <a:r>
             <a:rPr lang="en-US" sz="1600" cap="none" dirty="0"/>
-            <a:t>: You will implement algorithms to solve several tasks and conduct experiments to investigate how well the algorithms work and how they scale with problem size. </a:t>
+            <a:t>: You will implement algorithms to solve several tasks and conduct experiments to investigate how well the algorithms work and how they scale with problem size.</a:t>
+          </a:r>
+        </a:p>
+        <a:p>
+          <a:pPr>
+            <a:lnSpc>
+              <a:spcPct val="100000"/>
+            </a:lnSpc>
+            <a:defRPr cap="all"/>
+          </a:pPr>
+          <a:endParaRPr lang="en-US" sz="1600" cap="none" dirty="0"/>
+        </a:p>
+        <a:p>
+          <a:pPr>
+            <a:lnSpc>
+              <a:spcPct val="100000"/>
+            </a:lnSpc>
+            <a:defRPr cap="all"/>
+          </a:pPr>
+          <a:r>
+            <a:rPr lang="en-US" sz="1600" b="1" cap="none" dirty="0">
+              <a:solidFill>
+                <a:schemeClr val="accent3"/>
+              </a:solidFill>
+            </a:rPr>
+            <a:t>Research</a:t>
+          </a:r>
+          <a:r>
+            <a:rPr lang="en-US" sz="1600" cap="none" dirty="0">
+              <a:solidFill>
+                <a:schemeClr val="accent3"/>
+              </a:solidFill>
+            </a:rPr>
+            <a:t>: paper and presentation (graduate students only)</a:t>
+          </a:r>
+          <a:r>
+            <a:rPr lang="en-US" sz="1600" cap="none" dirty="0"/>
+            <a:t> </a:t>
           </a:r>
         </a:p>
       </dgm:t>
@@ -1714,7 +1751,58 @@
           </a:r>
           <a:r>
             <a:rPr lang="en-US" sz="1600" kern="1200" cap="none" dirty="0"/>
-            <a:t>: You will implement algorithms to solve several tasks and conduct experiments to investigate how well the algorithms work and how they scale with problem size. </a:t>
+            <a:t>: You will implement algorithms to solve several tasks and conduct experiments to investigate how well the algorithms work and how they scale with problem size.</a:t>
+          </a:r>
+        </a:p>
+        <a:p>
+          <a:pPr marL="0" lvl="0" indent="0" algn="ctr" defTabSz="711200">
+            <a:lnSpc>
+              <a:spcPct val="100000"/>
+            </a:lnSpc>
+            <a:spcBef>
+              <a:spcPct val="0"/>
+            </a:spcBef>
+            <a:spcAft>
+              <a:spcPct val="35000"/>
+            </a:spcAft>
+            <a:buNone/>
+            <a:defRPr cap="all"/>
+          </a:pPr>
+          <a:endParaRPr lang="en-US" sz="1600" kern="1200" cap="none" dirty="0"/>
+        </a:p>
+        <a:p>
+          <a:pPr marL="0" lvl="0" indent="0" algn="ctr" defTabSz="711200">
+            <a:lnSpc>
+              <a:spcPct val="100000"/>
+            </a:lnSpc>
+            <a:spcBef>
+              <a:spcPct val="0"/>
+            </a:spcBef>
+            <a:spcAft>
+              <a:spcPct val="35000"/>
+            </a:spcAft>
+            <a:buNone/>
+            <a:defRPr cap="all"/>
+          </a:pPr>
+          <a:r>
+            <a:rPr lang="en-US" sz="1600" b="1" kern="1200" cap="none" dirty="0">
+              <a:solidFill>
+                <a:schemeClr val="accent3"/>
+              </a:solidFill>
+            </a:rPr>
+            <a:t>Research</a:t>
+          </a:r>
+          <a:r>
+            <a:rPr lang="en-US" sz="1600" kern="1200" cap="none" dirty="0">
+              <a:solidFill>
+                <a:schemeClr val="accent3"/>
+              </a:solidFill>
+            </a:rPr>
+            <a:t>: paper and presentation (graduate students only)</a:t>
+          </a:r>
+          <a:r>
+            <a:rPr lang="en-US" sz="1600" kern="1200" cap="none" dirty="0"/>
+            <a:t> </a:t>
           </a:r>
         </a:p>
       </dsp:txBody>
@@ -2104,7 +2192,7 @@
 </file>
 
 <file path=ppt/diagrams/quickStyle1.xml><?xml version="1.0" encoding="utf-8"?>
-<dgm:styleDef xmlns:dgm="http://schemas.openxmlformats.org/drawingml/2006/diagram" xmlns:a="http://schemas.openxmlformats.org/drawingml/2006/main" uniqueId="urn:microsoft.com/office/officeart/2005/8/quickstyle/simple1">
+<dgm:styleDef xmlns:dgm="http://schemas.openxmlformats.org/drawingml/2006/diagram" xmlns:a="http://schemas.openxmlformats.org/drawingml/2006/main" uniqueId="urn:microsoft.com/office/officeart/2005/8/quickstyle/simple1#1">
   <dgm:title val=""/>
   <dgm:desc val=""/>
   <dgm:catLst>
@@ -3284,7 +3372,7 @@
           <a:p>
             <a:fld id="{3E22BF2E-04DA-469E-97C5-BB68A0368813}" type="datetimeFigureOut">
               <a:rPr lang="en-US" smtClean="0"/>
-              <a:t>4/9/2026</a:t>
+              <a:t>8/26/2026</a:t>
             </a:fld>
             <a:endParaRPr lang="en-US"/>
           </a:p>
@@ -3482,7 +3570,7 @@
           <a:p>
             <a:fld id="{3E22BF2E-04DA-469E-97C5-BB68A0368813}" type="datetimeFigureOut">
               <a:rPr lang="en-US" smtClean="0"/>
-              <a:t>4/9/2026</a:t>
+              <a:t>8/26/2026</a:t>
             </a:fld>
             <a:endParaRPr lang="en-US"/>
           </a:p>
@@ -3690,7 +3778,7 @@
           <a:p>
             <a:fld id="{3E22BF2E-04DA-469E-97C5-BB68A0368813}" type="datetimeFigureOut">
               <a:rPr lang="en-US" smtClean="0"/>
-              <a:t>4/9/2026</a:t>
+              <a:t>8/26/2026</a:t>
             </a:fld>
             <a:endParaRPr lang="en-US"/>
           </a:p>
@@ -3898,7 +3986,7 @@
           <a:p>
             <a:fld id="{3E22BF2E-04DA-469E-97C5-BB68A0368813}" type="datetimeFigureOut">
               <a:rPr lang="en-US" smtClean="0"/>
-              <a:t>4/9/2026</a:t>
+              <a:t>8/26/2026</a:t>
             </a:fld>
             <a:endParaRPr lang="en-US"/>
           </a:p>
@@ -4173,7 +4261,7 @@
           <a:p>
             <a:fld id="{3E22BF2E-04DA-469E-97C5-BB68A0368813}" type="datetimeFigureOut">
               <a:rPr lang="en-US" smtClean="0"/>
-              <a:t>4/9/2026</a:t>
+              <a:t>8/26/2026</a:t>
             </a:fld>
             <a:endParaRPr lang="en-US"/>
           </a:p>
@@ -4438,7 +4526,7 @@
           <a:p>
             <a:fld id="{3E22BF2E-04DA-469E-97C5-BB68A0368813}" type="datetimeFigureOut">
               <a:rPr lang="en-US" smtClean="0"/>
-              <a:t>4/9/2026</a:t>
+              <a:t>8/26/2026</a:t>
             </a:fld>
             <a:endParaRPr lang="en-US"/>
           </a:p>
@@ -4850,7 +4938,7 @@
           <a:p>
             <a:fld id="{3E22BF2E-04DA-469E-97C5-BB68A0368813}" type="datetimeFigureOut">
               <a:rPr lang="en-US" smtClean="0"/>
-              <a:t>4/9/2026</a:t>
+              <a:t>8/26/2026</a:t>
             </a:fld>
             <a:endParaRPr lang="en-US"/>
           </a:p>
@@ -4991,7 +5079,7 @@
           <a:p>
             <a:fld id="{3E22BF2E-04DA-469E-97C5-BB68A0368813}" type="datetimeFigureOut">
               <a:rPr lang="en-US" smtClean="0"/>
-              <a:t>4/9/2026</a:t>
+              <a:t>8/26/2026</a:t>
             </a:fld>
             <a:endParaRPr lang="en-US"/>
           </a:p>
@@ -5104,7 +5192,7 @@
           <a:p>
             <a:fld id="{3E22BF2E-04DA-469E-97C5-BB68A0368813}" type="datetimeFigureOut">
               <a:rPr lang="en-US" smtClean="0"/>
-              <a:t>4/9/2026</a:t>
+              <a:t>8/26/2026</a:t>
             </a:fld>
             <a:endParaRPr lang="en-US"/>
           </a:p>
@@ -5415,7 +5503,7 @@
           <a:p>
             <a:fld id="{3E22BF2E-04DA-469E-97C5-BB68A0368813}" type="datetimeFigureOut">
               <a:rPr lang="en-US" smtClean="0"/>
-              <a:t>4/9/2026</a:t>
+              <a:t>8/26/2026</a:t>
             </a:fld>
             <a:endParaRPr lang="en-US"/>
           </a:p>
@@ -5703,7 +5791,7 @@
           <a:p>
             <a:fld id="{3E22BF2E-04DA-469E-97C5-BB68A0368813}" type="datetimeFigureOut">
               <a:rPr lang="en-US" smtClean="0"/>
-              <a:t>4/9/2026</a:t>
+              <a:t>8/26/2026</a:t>
             </a:fld>
             <a:endParaRPr lang="en-US"/>
           </a:p>
@@ -5944,7 +6032,7 @@
           <a:p>
             <a:fld id="{3E22BF2E-04DA-469E-97C5-BB68A0368813}" type="datetimeFigureOut">
               <a:rPr lang="en-US" smtClean="0"/>
-              <a:t>4/9/2026</a:t>
+              <a:t>8/26/2026</a:t>
             </a:fld>
             <a:endParaRPr lang="en-US"/>
           </a:p>
@@ -7628,13 +7716,13 @@
           <p:nvPr>
             <p:extLst>
               <p:ext uri="{D42A27DB-BD31-4B8C-83A1-F6EECF244321}">
-                <p14:modId xmlns:p14="http://schemas.microsoft.com/office/powerpoint/2010/main" val="95225928"/>
+                <p14:modId xmlns:p14="http://schemas.microsoft.com/office/powerpoint/2010/main" val="3343688815"/>
               </p:ext>
             </p:extLst>
           </p:nvPr>
         </p:nvGraphicFramePr>
         <p:xfrm>
-          <a:off x="1007350" y="1550511"/>
+          <a:off x="966467" y="1124198"/>
           <a:ext cx="10259066" cy="3678621"/>
         </p:xfrm>
         <a:graphic>
@@ -7657,23 +7745,41 @@
         </p:nvSpPr>
         <p:spPr>
           <a:xfrm>
-            <a:off x="981508" y="5546514"/>
+            <a:off x="1052514" y="6123542"/>
             <a:ext cx="10301286" cy="369332"/>
           </a:xfrm>
           <a:prstGeom prst="rect">
             <a:avLst/>
           </a:prstGeom>
-          <a:noFill/>
         </p:spPr>
+        <p:style>
+          <a:lnRef idx="3">
+            <a:schemeClr val="lt1"/>
+          </a:lnRef>
+          <a:fillRef idx="1">
+            <a:schemeClr val="accent1"/>
+          </a:fillRef>
+          <a:effectRef idx="1">
+            <a:schemeClr val="accent1"/>
+          </a:effectRef>
+          <a:fontRef idx="minor">
+            <a:schemeClr val="lt1"/>
+          </a:fontRef>
+        </p:style>
         <p:txBody>
           <a:bodyPr wrap="square" rtlCol="0">
             <a:spAutoFit/>
           </a:bodyPr>
           <a:lstStyle/>
           <a:p>
+            <a:pPr algn="ctr"/>
+            <a:r>
+              <a:rPr lang="en-US" b="1" dirty="0"/>
+              <a:t>Evaluation: </a:t>
+            </a:r>
             <a:r>
               <a:rPr lang="en-US" dirty="0"/>
-              <a:t>Evaluation is based on problem sets, projects, and exams.</a:t>
+              <a:t>is based on problem sets, projects, and exams.     + research paper for graduate students</a:t>
             </a:r>
           </a:p>
         </p:txBody>

--- a/slides/00_course_intro.pptx
+++ b/slides/00_course_intro.pptx
@@ -7509,7 +7509,7 @@
         <p:spPr/>
         <p:txBody>
           <a:bodyPr>
-            <a:normAutofit fontScale="70000" lnSpcReduction="20000"/>
+            <a:normAutofit fontScale="77500" lnSpcReduction="20000"/>
           </a:bodyPr>
           <a:lstStyle/>
           <a:p>
@@ -7611,11 +7611,19 @@
             </a:pPr>
             <a:r>
               <a:rPr lang="en-US" dirty="0"/>
-              <a:t>CLO 6: Implement reinforcement learning agents with </a:t>
+              <a:t>CLO 6: Implement reinforcement learning agents </a:t>
+            </a:r>
+            <a:r>
+              <a:rPr lang="en-US"/>
+              <a:t>with </a:t>
+            </a:r>
+            <a:r>
+              <a:rPr lang="en-US" b="1"/>
+              <a:t>policy </a:t>
             </a:r>
             <a:r>
               <a:rPr lang="en-US" b="1" dirty="0"/>
-              <a:t>eligibility traces and policy gradients</a:t>
+              <a:t>gradients</a:t>
             </a:r>
           </a:p>
           <a:p>
